--- a/Data Extraction/3-Data Extraction from Non-Relational Databases.pptx
+++ b/Data Extraction/3-Data Extraction from Non-Relational Databases.pptx
@@ -177,6 +177,9 @@
         </p14:section>
       </p14:sectionLst>
     </p:ext>
+    <p:ext uri="{EFAFB233-063F-42B5-8137-9DF3F51BA10A}">
+      <p15:sldGuideLst xmlns:p15="http://schemas.microsoft.com/office/powerpoint/2012/main"/>
+    </p:ext>
   </p:extLst>
 </p:presentation>
 </file>
@@ -263,7 +266,7 @@
           <a:p>
             <a:fld id="{52ABD4C0-A852-49C9-AC39-C3316EE476DA}" type="datetimeFigureOut">
               <a:rPr lang="en-IN" smtClean="0"/>
-              <a:t>03-Oct-2024 Thu</a:t>
+              <a:t>04-Oct-2024 Fri</a:t>
             </a:fld>
             <a:endParaRPr lang="en-IN"/>
           </a:p>
@@ -2338,9 +2341,9 @@
           <a:bodyPr/>
           <a:lstStyle/>
           <a:p>
-            <a:fld id="{3391A759-BFF8-4B5B-9ECE-D93AC303B331}" type="datetime1">
+            <a:fld id="{41281540-7954-439F-BF7E-745F274B8A5B}" type="datetime1">
               <a:rPr lang="en-US" smtClean="0"/>
-              <a:t>10/3/2024</a:t>
+              <a:t>10/4/2024</a:t>
             </a:fld>
             <a:endParaRPr lang="en-US"/>
           </a:p>
@@ -2592,9 +2595,9 @@
           <a:bodyPr/>
           <a:lstStyle/>
           <a:p>
-            <a:fld id="{6DFDF398-5DA3-4937-BE3F-7CA1B9158252}" type="datetime1">
+            <a:fld id="{6876A433-D847-42A2-9DB8-F34F33583EDC}" type="datetime1">
               <a:rPr lang="en-US" smtClean="0"/>
-              <a:t>10/3/2024</a:t>
+              <a:t>10/4/2024</a:t>
             </a:fld>
             <a:endParaRPr lang="en-US"/>
           </a:p>
@@ -2802,9 +2805,9 @@
           <a:bodyPr/>
           <a:lstStyle/>
           <a:p>
-            <a:fld id="{8F191ED9-F929-4A92-90F9-3C9C84ABBE83}" type="datetime1">
+            <a:fld id="{1A4EA681-FE6B-4DA2-AD9E-A3F74BB0595B}" type="datetime1">
               <a:rPr lang="en-US" smtClean="0"/>
-              <a:t>10/3/2024</a:t>
+              <a:t>10/4/2024</a:t>
             </a:fld>
             <a:endParaRPr lang="en-US"/>
           </a:p>
@@ -3057,9 +3060,9 @@
           <a:bodyPr/>
           <a:lstStyle/>
           <a:p>
-            <a:fld id="{EEBAB316-A2E6-49F2-825C-64AA951E4184}" type="datetime1">
+            <a:fld id="{C4052552-F721-4D49-9D73-38D4FB9D29B9}" type="datetime1">
               <a:rPr lang="en-US" smtClean="0"/>
-              <a:t>10/3/2024</a:t>
+              <a:t>10/4/2024</a:t>
             </a:fld>
             <a:endParaRPr lang="en-US"/>
           </a:p>
@@ -3335,9 +3338,9 @@
           <a:bodyPr/>
           <a:lstStyle/>
           <a:p>
-            <a:fld id="{5AE9748B-ADD6-4C5A-8C2A-A39721276E74}" type="datetime1">
+            <a:fld id="{1F3AB856-76C9-4452-8DFA-A670C1A7B954}" type="datetime1">
               <a:rPr lang="en-US" smtClean="0"/>
-              <a:t>10/3/2024</a:t>
+              <a:t>10/4/2024</a:t>
             </a:fld>
             <a:endParaRPr lang="en-US"/>
           </a:p>
@@ -3607,9 +3610,9 @@
           <a:bodyPr/>
           <a:lstStyle/>
           <a:p>
-            <a:fld id="{7241FB0F-3C5C-4949-B933-9C7E511ED094}" type="datetime1">
+            <a:fld id="{98E3AE97-E3DF-48D0-88E2-65A5B23EC22F}" type="datetime1">
               <a:rPr lang="en-US" smtClean="0"/>
-              <a:t>10/3/2024</a:t>
+              <a:t>10/4/2024</a:t>
             </a:fld>
             <a:endParaRPr lang="en-US"/>
           </a:p>
@@ -4095,9 +4098,9 @@
           <a:bodyPr/>
           <a:lstStyle/>
           <a:p>
-            <a:fld id="{C2F01D58-E949-4BCB-829A-BBF80E38D59C}" type="datetime1">
+            <a:fld id="{95E5650F-889B-48B3-BEA8-941A61C34D3B}" type="datetime1">
               <a:rPr lang="en-US" smtClean="0"/>
-              <a:t>10/3/2024</a:t>
+              <a:t>10/4/2024</a:t>
             </a:fld>
             <a:endParaRPr lang="en-US"/>
           </a:p>
@@ -4237,9 +4240,9 @@
           <a:bodyPr/>
           <a:lstStyle/>
           <a:p>
-            <a:fld id="{FF10A846-0DA4-4D92-9BF1-DE8C52C1F4DF}" type="datetime1">
+            <a:fld id="{B62323AA-D4F7-48D1-B4EB-B6C1CA8F8A08}" type="datetime1">
               <a:rPr lang="en-US" smtClean="0"/>
-              <a:t>10/3/2024</a:t>
+              <a:t>10/4/2024</a:t>
             </a:fld>
             <a:endParaRPr lang="en-US"/>
           </a:p>
@@ -4350,9 +4353,9 @@
           <a:bodyPr/>
           <a:lstStyle/>
           <a:p>
-            <a:fld id="{E9412331-4A9C-472F-A7FA-968157338839}" type="datetime1">
+            <a:fld id="{9187FD51-FF54-4CF6-B060-3DEA2444E80C}" type="datetime1">
               <a:rPr lang="en-US" smtClean="0"/>
-              <a:t>10/3/2024</a:t>
+              <a:t>10/4/2024</a:t>
             </a:fld>
             <a:endParaRPr lang="en-US"/>
           </a:p>
@@ -4669,9 +4672,9 @@
           <a:bodyPr/>
           <a:lstStyle/>
           <a:p>
-            <a:fld id="{A2197F3D-ED52-43FD-A26D-318B71534485}" type="datetime1">
+            <a:fld id="{976B7FD1-E7A8-4142-A198-1809E76AD60A}" type="datetime1">
               <a:rPr lang="en-US" smtClean="0"/>
-              <a:t>10/3/2024</a:t>
+              <a:t>10/4/2024</a:t>
             </a:fld>
             <a:endParaRPr lang="en-US"/>
           </a:p>
@@ -4966,9 +4969,9 @@
           <a:bodyPr/>
           <a:lstStyle/>
           <a:p>
-            <a:fld id="{3D291FA4-6264-4BB8-B3B5-77711EED2D82}" type="datetime1">
+            <a:fld id="{AD822740-13CC-491F-84DE-671ACB260A90}" type="datetime1">
               <a:rPr lang="en-US" smtClean="0"/>
-              <a:t>10/3/2024</a:t>
+              <a:t>10/4/2024</a:t>
             </a:fld>
             <a:endParaRPr lang="en-US"/>
           </a:p>
@@ -5207,9 +5210,9 @@
             </a:lvl1pPr>
           </a:lstStyle>
           <a:p>
-            <a:fld id="{E7F6A1D9-D323-4F4E-8655-25E2D32CE742}" type="datetime1">
+            <a:fld id="{C2C6AA33-F6EC-46FA-8717-BBE127594C24}" type="datetime1">
               <a:rPr lang="en-US" smtClean="0"/>
-              <a:t>10/3/2024</a:t>
+              <a:t>10/4/2024</a:t>
             </a:fld>
             <a:endParaRPr lang="en-US"/>
           </a:p>
@@ -5479,7 +5482,7 @@
     <p:sldLayoutId id="2147483670" r:id="rId10"/>
     <p:sldLayoutId id="2147483671" r:id="rId11"/>
   </p:sldLayoutIdLst>
-  <p:hf sldNum="0" hdr="0" ftr="0" dt="0"/>
+  <p:hf hdr="0" ftr="0" dt="0"/>
   <p:txStyles>
     <p:titleStyle>
       <a:lvl1pPr algn="l" defTabSz="914400" rtl="0" eaLnBrk="1" latinLnBrk="0" hangingPunct="1">
@@ -6347,6 +6350,35 @@
           </a:p>
         </p:txBody>
       </p:sp>
+      <p:sp>
+        <p:nvSpPr>
+          <p:cNvPr id="5" name="Slide Number Placeholder 4">
+            <a:extLst>
+              <a:ext uri="{FF2B5EF4-FFF2-40B4-BE49-F238E27FC236}">
+                <a16:creationId xmlns:a16="http://schemas.microsoft.com/office/drawing/2014/main" id="{B9FFE972-8482-0D16-D427-761164B86484}"/>
+              </a:ext>
+            </a:extLst>
+          </p:cNvPr>
+          <p:cNvSpPr>
+            <a:spLocks noGrp="1"/>
+          </p:cNvSpPr>
+          <p:nvPr>
+            <p:ph type="sldNum" sz="quarter" idx="12"/>
+          </p:nvPr>
+        </p:nvSpPr>
+        <p:spPr/>
+        <p:txBody>
+          <a:bodyPr/>
+          <a:lstStyle/>
+          <a:p>
+            <a:fld id="{DFDF98CC-160E-494C-8C3C-8CDC5FA257DE}" type="slidenum">
+              <a:rPr lang="en-US" smtClean="0"/>
+              <a:t>1</a:t>
+            </a:fld>
+            <a:endParaRPr lang="en-US"/>
+          </a:p>
+        </p:txBody>
+      </p:sp>
     </p:spTree>
     <p:extLst>
       <p:ext uri="{BB962C8B-B14F-4D97-AF65-F5344CB8AC3E}">
@@ -7245,6 +7277,35 @@
           </a:p>
         </p:txBody>
       </p:sp>
+      <p:sp>
+        <p:nvSpPr>
+          <p:cNvPr id="3" name="Slide Number Placeholder 2">
+            <a:extLst>
+              <a:ext uri="{FF2B5EF4-FFF2-40B4-BE49-F238E27FC236}">
+                <a16:creationId xmlns:a16="http://schemas.microsoft.com/office/drawing/2014/main" id="{2A405E49-15BC-4B5D-786D-D6E3E6360770}"/>
+              </a:ext>
+            </a:extLst>
+          </p:cNvPr>
+          <p:cNvSpPr>
+            <a:spLocks noGrp="1"/>
+          </p:cNvSpPr>
+          <p:nvPr>
+            <p:ph type="sldNum" sz="quarter" idx="12"/>
+          </p:nvPr>
+        </p:nvSpPr>
+        <p:spPr/>
+        <p:txBody>
+          <a:bodyPr/>
+          <a:lstStyle/>
+          <a:p>
+            <a:fld id="{DFDF98CC-160E-494C-8C3C-8CDC5FA257DE}" type="slidenum">
+              <a:rPr lang="en-US" smtClean="0"/>
+              <a:t>10</a:t>
+            </a:fld>
+            <a:endParaRPr lang="en-US"/>
+          </a:p>
+        </p:txBody>
+      </p:sp>
     </p:spTree>
     <p:extLst>
       <p:ext uri="{BB962C8B-B14F-4D97-AF65-F5344CB8AC3E}">
@@ -7992,6 +8053,35 @@
           </a:p>
         </p:txBody>
       </p:sp>
+      <p:sp>
+        <p:nvSpPr>
+          <p:cNvPr id="3" name="Slide Number Placeholder 2">
+            <a:extLst>
+              <a:ext uri="{FF2B5EF4-FFF2-40B4-BE49-F238E27FC236}">
+                <a16:creationId xmlns:a16="http://schemas.microsoft.com/office/drawing/2014/main" id="{6D03BF95-8D9C-B1E1-EF6D-2A94711E7F4C}"/>
+              </a:ext>
+            </a:extLst>
+          </p:cNvPr>
+          <p:cNvSpPr>
+            <a:spLocks noGrp="1"/>
+          </p:cNvSpPr>
+          <p:nvPr>
+            <p:ph type="sldNum" sz="quarter" idx="12"/>
+          </p:nvPr>
+        </p:nvSpPr>
+        <p:spPr/>
+        <p:txBody>
+          <a:bodyPr/>
+          <a:lstStyle/>
+          <a:p>
+            <a:fld id="{DFDF98CC-160E-494C-8C3C-8CDC5FA257DE}" type="slidenum">
+              <a:rPr lang="en-US" smtClean="0"/>
+              <a:t>11</a:t>
+            </a:fld>
+            <a:endParaRPr lang="en-US"/>
+          </a:p>
+        </p:txBody>
+      </p:sp>
     </p:spTree>
     <p:extLst>
       <p:ext uri="{BB962C8B-B14F-4D97-AF65-F5344CB8AC3E}">
@@ -8807,6 +8897,35 @@
           </a:p>
         </p:txBody>
       </p:sp>
+      <p:sp>
+        <p:nvSpPr>
+          <p:cNvPr id="3" name="Slide Number Placeholder 2">
+            <a:extLst>
+              <a:ext uri="{FF2B5EF4-FFF2-40B4-BE49-F238E27FC236}">
+                <a16:creationId xmlns:a16="http://schemas.microsoft.com/office/drawing/2014/main" id="{4AFF41F0-2E09-03C8-8F86-082505B6B99D}"/>
+              </a:ext>
+            </a:extLst>
+          </p:cNvPr>
+          <p:cNvSpPr>
+            <a:spLocks noGrp="1"/>
+          </p:cNvSpPr>
+          <p:nvPr>
+            <p:ph type="sldNum" sz="quarter" idx="12"/>
+          </p:nvPr>
+        </p:nvSpPr>
+        <p:spPr/>
+        <p:txBody>
+          <a:bodyPr/>
+          <a:lstStyle/>
+          <a:p>
+            <a:fld id="{DFDF98CC-160E-494C-8C3C-8CDC5FA257DE}" type="slidenum">
+              <a:rPr lang="en-US" smtClean="0"/>
+              <a:t>12</a:t>
+            </a:fld>
+            <a:endParaRPr lang="en-US"/>
+          </a:p>
+        </p:txBody>
+      </p:sp>
     </p:spTree>
     <p:extLst>
       <p:ext uri="{BB962C8B-B14F-4D97-AF65-F5344CB8AC3E}">
@@ -9565,6 +9684,35 @@
           </a:p>
         </p:txBody>
       </p:sp>
+      <p:sp>
+        <p:nvSpPr>
+          <p:cNvPr id="3" name="Slide Number Placeholder 2">
+            <a:extLst>
+              <a:ext uri="{FF2B5EF4-FFF2-40B4-BE49-F238E27FC236}">
+                <a16:creationId xmlns:a16="http://schemas.microsoft.com/office/drawing/2014/main" id="{5B70496A-8441-EA97-AC8C-63D90C342575}"/>
+              </a:ext>
+            </a:extLst>
+          </p:cNvPr>
+          <p:cNvSpPr>
+            <a:spLocks noGrp="1"/>
+          </p:cNvSpPr>
+          <p:nvPr>
+            <p:ph type="sldNum" sz="quarter" idx="12"/>
+          </p:nvPr>
+        </p:nvSpPr>
+        <p:spPr/>
+        <p:txBody>
+          <a:bodyPr/>
+          <a:lstStyle/>
+          <a:p>
+            <a:fld id="{DFDF98CC-160E-494C-8C3C-8CDC5FA257DE}" type="slidenum">
+              <a:rPr lang="en-US" smtClean="0"/>
+              <a:t>13</a:t>
+            </a:fld>
+            <a:endParaRPr lang="en-US"/>
+          </a:p>
+        </p:txBody>
+      </p:sp>
     </p:spTree>
     <p:extLst>
       <p:ext uri="{BB962C8B-B14F-4D97-AF65-F5344CB8AC3E}">
@@ -10180,6 +10328,35 @@
           <a:lstStyle/>
           <a:p>
             <a:pPr algn="ctr"/>
+            <a:endParaRPr lang="en-US"/>
+          </a:p>
+        </p:txBody>
+      </p:sp>
+      <p:sp>
+        <p:nvSpPr>
+          <p:cNvPr id="3" name="Slide Number Placeholder 2">
+            <a:extLst>
+              <a:ext uri="{FF2B5EF4-FFF2-40B4-BE49-F238E27FC236}">
+                <a16:creationId xmlns:a16="http://schemas.microsoft.com/office/drawing/2014/main" id="{4CCA6FAE-A704-A4CF-B0ED-224D7F5AAC92}"/>
+              </a:ext>
+            </a:extLst>
+          </p:cNvPr>
+          <p:cNvSpPr>
+            <a:spLocks noGrp="1"/>
+          </p:cNvSpPr>
+          <p:nvPr>
+            <p:ph type="sldNum" sz="quarter" idx="12"/>
+          </p:nvPr>
+        </p:nvSpPr>
+        <p:spPr/>
+        <p:txBody>
+          <a:bodyPr/>
+          <a:lstStyle/>
+          <a:p>
+            <a:fld id="{DFDF98CC-160E-494C-8C3C-8CDC5FA257DE}" type="slidenum">
+              <a:rPr lang="en-US" smtClean="0"/>
+              <a:t>14</a:t>
+            </a:fld>
             <a:endParaRPr lang="en-US"/>
           </a:p>
         </p:txBody>
@@ -10999,6 +11176,35 @@
           </a:p>
         </p:txBody>
       </p:sp>
+      <p:sp>
+        <p:nvSpPr>
+          <p:cNvPr id="3" name="Slide Number Placeholder 2">
+            <a:extLst>
+              <a:ext uri="{FF2B5EF4-FFF2-40B4-BE49-F238E27FC236}">
+                <a16:creationId xmlns:a16="http://schemas.microsoft.com/office/drawing/2014/main" id="{ACC78CF9-541A-C25E-FA8C-93CD800D2205}"/>
+              </a:ext>
+            </a:extLst>
+          </p:cNvPr>
+          <p:cNvSpPr>
+            <a:spLocks noGrp="1"/>
+          </p:cNvSpPr>
+          <p:nvPr>
+            <p:ph type="sldNum" sz="quarter" idx="12"/>
+          </p:nvPr>
+        </p:nvSpPr>
+        <p:spPr/>
+        <p:txBody>
+          <a:bodyPr/>
+          <a:lstStyle/>
+          <a:p>
+            <a:fld id="{DFDF98CC-160E-494C-8C3C-8CDC5FA257DE}" type="slidenum">
+              <a:rPr lang="en-US" smtClean="0"/>
+              <a:t>15</a:t>
+            </a:fld>
+            <a:endParaRPr lang="en-US"/>
+          </a:p>
+        </p:txBody>
+      </p:sp>
     </p:spTree>
     <p:extLst>
       <p:ext uri="{BB962C8B-B14F-4D97-AF65-F5344CB8AC3E}">
@@ -11757,6 +11963,35 @@
           </a:p>
         </p:txBody>
       </p:sp>
+      <p:sp>
+        <p:nvSpPr>
+          <p:cNvPr id="3" name="Slide Number Placeholder 2">
+            <a:extLst>
+              <a:ext uri="{FF2B5EF4-FFF2-40B4-BE49-F238E27FC236}">
+                <a16:creationId xmlns:a16="http://schemas.microsoft.com/office/drawing/2014/main" id="{F1C011C5-922D-DEE0-E2A5-E4FD67CFA42A}"/>
+              </a:ext>
+            </a:extLst>
+          </p:cNvPr>
+          <p:cNvSpPr>
+            <a:spLocks noGrp="1"/>
+          </p:cNvSpPr>
+          <p:nvPr>
+            <p:ph type="sldNum" sz="quarter" idx="12"/>
+          </p:nvPr>
+        </p:nvSpPr>
+        <p:spPr/>
+        <p:txBody>
+          <a:bodyPr/>
+          <a:lstStyle/>
+          <a:p>
+            <a:fld id="{DFDF98CC-160E-494C-8C3C-8CDC5FA257DE}" type="slidenum">
+              <a:rPr lang="en-US" smtClean="0"/>
+              <a:t>16</a:t>
+            </a:fld>
+            <a:endParaRPr lang="en-US"/>
+          </a:p>
+        </p:txBody>
+      </p:sp>
     </p:spTree>
     <p:extLst>
       <p:ext uri="{BB962C8B-B14F-4D97-AF65-F5344CB8AC3E}">
@@ -12523,6 +12758,35 @@
               <a:ea typeface="+mn-ea"/>
               <a:cs typeface="+mn-cs"/>
             </a:endParaRPr>
+          </a:p>
+        </p:txBody>
+      </p:sp>
+      <p:sp>
+        <p:nvSpPr>
+          <p:cNvPr id="3" name="Slide Number Placeholder 2">
+            <a:extLst>
+              <a:ext uri="{FF2B5EF4-FFF2-40B4-BE49-F238E27FC236}">
+                <a16:creationId xmlns:a16="http://schemas.microsoft.com/office/drawing/2014/main" id="{F718954C-145C-37E7-D462-141A86E6440D}"/>
+              </a:ext>
+            </a:extLst>
+          </p:cNvPr>
+          <p:cNvSpPr>
+            <a:spLocks noGrp="1"/>
+          </p:cNvSpPr>
+          <p:nvPr>
+            <p:ph type="sldNum" sz="quarter" idx="12"/>
+          </p:nvPr>
+        </p:nvSpPr>
+        <p:spPr/>
+        <p:txBody>
+          <a:bodyPr/>
+          <a:lstStyle/>
+          <a:p>
+            <a:fld id="{DFDF98CC-160E-494C-8C3C-8CDC5FA257DE}" type="slidenum">
+              <a:rPr lang="en-US" smtClean="0"/>
+              <a:t>17</a:t>
+            </a:fld>
+            <a:endParaRPr lang="en-US"/>
           </a:p>
         </p:txBody>
       </p:sp>
@@ -13211,6 +13475,35 @@
           <a:lstStyle/>
           <a:p>
             <a:pPr algn="ctr"/>
+            <a:endParaRPr lang="en-US"/>
+          </a:p>
+        </p:txBody>
+      </p:sp>
+      <p:sp>
+        <p:nvSpPr>
+          <p:cNvPr id="3" name="Slide Number Placeholder 2">
+            <a:extLst>
+              <a:ext uri="{FF2B5EF4-FFF2-40B4-BE49-F238E27FC236}">
+                <a16:creationId xmlns:a16="http://schemas.microsoft.com/office/drawing/2014/main" id="{40A5557A-1485-8F6D-FD14-D53060BD4DBE}"/>
+              </a:ext>
+            </a:extLst>
+          </p:cNvPr>
+          <p:cNvSpPr>
+            <a:spLocks noGrp="1"/>
+          </p:cNvSpPr>
+          <p:nvPr>
+            <p:ph type="sldNum" sz="quarter" idx="12"/>
+          </p:nvPr>
+        </p:nvSpPr>
+        <p:spPr/>
+        <p:txBody>
+          <a:bodyPr/>
+          <a:lstStyle/>
+          <a:p>
+            <a:fld id="{DFDF98CC-160E-494C-8C3C-8CDC5FA257DE}" type="slidenum">
+              <a:rPr lang="en-US" smtClean="0"/>
+              <a:t>18</a:t>
+            </a:fld>
             <a:endParaRPr lang="en-US"/>
           </a:p>
         </p:txBody>
@@ -13719,6 +14012,35 @@
           </a:p>
         </p:txBody>
       </p:sp>
+      <p:sp>
+        <p:nvSpPr>
+          <p:cNvPr id="4" name="Slide Number Placeholder 3">
+            <a:extLst>
+              <a:ext uri="{FF2B5EF4-FFF2-40B4-BE49-F238E27FC236}">
+                <a16:creationId xmlns:a16="http://schemas.microsoft.com/office/drawing/2014/main" id="{E1713E82-461F-7E21-0F7C-D545597DF547}"/>
+              </a:ext>
+            </a:extLst>
+          </p:cNvPr>
+          <p:cNvSpPr>
+            <a:spLocks noGrp="1"/>
+          </p:cNvSpPr>
+          <p:nvPr>
+            <p:ph type="sldNum" sz="quarter" idx="12"/>
+          </p:nvPr>
+        </p:nvSpPr>
+        <p:spPr/>
+        <p:txBody>
+          <a:bodyPr/>
+          <a:lstStyle/>
+          <a:p>
+            <a:fld id="{DFDF98CC-160E-494C-8C3C-8CDC5FA257DE}" type="slidenum">
+              <a:rPr lang="en-US" smtClean="0"/>
+              <a:t>19</a:t>
+            </a:fld>
+            <a:endParaRPr lang="en-US"/>
+          </a:p>
+        </p:txBody>
+      </p:sp>
     </p:spTree>
     <p:extLst>
       <p:ext uri="{BB962C8B-B14F-4D97-AF65-F5344CB8AC3E}">
@@ -14438,6 +14760,35 @@
           </a:p>
         </p:txBody>
       </p:sp>
+      <p:sp>
+        <p:nvSpPr>
+          <p:cNvPr id="3" name="Slide Number Placeholder 2">
+            <a:extLst>
+              <a:ext uri="{FF2B5EF4-FFF2-40B4-BE49-F238E27FC236}">
+                <a16:creationId xmlns:a16="http://schemas.microsoft.com/office/drawing/2014/main" id="{D9D3B659-AF55-BC31-11D2-AC6FB041EF8D}"/>
+              </a:ext>
+            </a:extLst>
+          </p:cNvPr>
+          <p:cNvSpPr>
+            <a:spLocks noGrp="1"/>
+          </p:cNvSpPr>
+          <p:nvPr>
+            <p:ph type="sldNum" sz="quarter" idx="12"/>
+          </p:nvPr>
+        </p:nvSpPr>
+        <p:spPr/>
+        <p:txBody>
+          <a:bodyPr/>
+          <a:lstStyle/>
+          <a:p>
+            <a:fld id="{DFDF98CC-160E-494C-8C3C-8CDC5FA257DE}" type="slidenum">
+              <a:rPr lang="en-US" smtClean="0"/>
+              <a:t>2</a:t>
+            </a:fld>
+            <a:endParaRPr lang="en-US"/>
+          </a:p>
+        </p:txBody>
+      </p:sp>
     </p:spTree>
     <p:extLst>
       <p:ext uri="{BB962C8B-B14F-4D97-AF65-F5344CB8AC3E}">
@@ -15196,6 +15547,35 @@
           </a:p>
         </p:txBody>
       </p:sp>
+      <p:sp>
+        <p:nvSpPr>
+          <p:cNvPr id="3" name="Slide Number Placeholder 2">
+            <a:extLst>
+              <a:ext uri="{FF2B5EF4-FFF2-40B4-BE49-F238E27FC236}">
+                <a16:creationId xmlns:a16="http://schemas.microsoft.com/office/drawing/2014/main" id="{314202A0-0CB2-7130-4568-BF991CBCBF0E}"/>
+              </a:ext>
+            </a:extLst>
+          </p:cNvPr>
+          <p:cNvSpPr>
+            <a:spLocks noGrp="1"/>
+          </p:cNvSpPr>
+          <p:nvPr>
+            <p:ph type="sldNum" sz="quarter" idx="12"/>
+          </p:nvPr>
+        </p:nvSpPr>
+        <p:spPr/>
+        <p:txBody>
+          <a:bodyPr/>
+          <a:lstStyle/>
+          <a:p>
+            <a:fld id="{DFDF98CC-160E-494C-8C3C-8CDC5FA257DE}" type="slidenum">
+              <a:rPr lang="en-US" smtClean="0"/>
+              <a:t>3</a:t>
+            </a:fld>
+            <a:endParaRPr lang="en-US"/>
+          </a:p>
+        </p:txBody>
+      </p:sp>
     </p:spTree>
     <p:extLst>
       <p:ext uri="{BB962C8B-B14F-4D97-AF65-F5344CB8AC3E}">
@@ -15849,6 +16229,35 @@
               <a:ea typeface="+mn-ea"/>
               <a:cs typeface="+mn-cs"/>
             </a:endParaRPr>
+          </a:p>
+        </p:txBody>
+      </p:sp>
+      <p:sp>
+        <p:nvSpPr>
+          <p:cNvPr id="3" name="Slide Number Placeholder 2">
+            <a:extLst>
+              <a:ext uri="{FF2B5EF4-FFF2-40B4-BE49-F238E27FC236}">
+                <a16:creationId xmlns:a16="http://schemas.microsoft.com/office/drawing/2014/main" id="{79FC050A-E4BE-F998-D30C-978530B9C15D}"/>
+              </a:ext>
+            </a:extLst>
+          </p:cNvPr>
+          <p:cNvSpPr>
+            <a:spLocks noGrp="1"/>
+          </p:cNvSpPr>
+          <p:nvPr>
+            <p:ph type="sldNum" sz="quarter" idx="12"/>
+          </p:nvPr>
+        </p:nvSpPr>
+        <p:spPr/>
+        <p:txBody>
+          <a:bodyPr/>
+          <a:lstStyle/>
+          <a:p>
+            <a:fld id="{DFDF98CC-160E-494C-8C3C-8CDC5FA257DE}" type="slidenum">
+              <a:rPr lang="en-US" smtClean="0"/>
+              <a:t>4</a:t>
+            </a:fld>
+            <a:endParaRPr lang="en-US"/>
           </a:p>
         </p:txBody>
       </p:sp>
@@ -16549,6 +16958,35 @@
           </a:p>
         </p:txBody>
       </p:sp>
+      <p:sp>
+        <p:nvSpPr>
+          <p:cNvPr id="3" name="Slide Number Placeholder 2">
+            <a:extLst>
+              <a:ext uri="{FF2B5EF4-FFF2-40B4-BE49-F238E27FC236}">
+                <a16:creationId xmlns:a16="http://schemas.microsoft.com/office/drawing/2014/main" id="{CB9F9105-8AC0-BA3A-2C85-56F24171620A}"/>
+              </a:ext>
+            </a:extLst>
+          </p:cNvPr>
+          <p:cNvSpPr>
+            <a:spLocks noGrp="1"/>
+          </p:cNvSpPr>
+          <p:nvPr>
+            <p:ph type="sldNum" sz="quarter" idx="12"/>
+          </p:nvPr>
+        </p:nvSpPr>
+        <p:spPr/>
+        <p:txBody>
+          <a:bodyPr/>
+          <a:lstStyle/>
+          <a:p>
+            <a:fld id="{DFDF98CC-160E-494C-8C3C-8CDC5FA257DE}" type="slidenum">
+              <a:rPr lang="en-US" smtClean="0"/>
+              <a:t>5</a:t>
+            </a:fld>
+            <a:endParaRPr lang="en-US"/>
+          </a:p>
+        </p:txBody>
+      </p:sp>
     </p:spTree>
     <p:extLst>
       <p:ext uri="{BB962C8B-B14F-4D97-AF65-F5344CB8AC3E}">
@@ -17307,6 +17745,35 @@
           </a:p>
         </p:txBody>
       </p:sp>
+      <p:sp>
+        <p:nvSpPr>
+          <p:cNvPr id="3" name="Slide Number Placeholder 2">
+            <a:extLst>
+              <a:ext uri="{FF2B5EF4-FFF2-40B4-BE49-F238E27FC236}">
+                <a16:creationId xmlns:a16="http://schemas.microsoft.com/office/drawing/2014/main" id="{BC5B0743-54E4-B63D-F70F-AED5510395AF}"/>
+              </a:ext>
+            </a:extLst>
+          </p:cNvPr>
+          <p:cNvSpPr>
+            <a:spLocks noGrp="1"/>
+          </p:cNvSpPr>
+          <p:nvPr>
+            <p:ph type="sldNum" sz="quarter" idx="12"/>
+          </p:nvPr>
+        </p:nvSpPr>
+        <p:spPr/>
+        <p:txBody>
+          <a:bodyPr/>
+          <a:lstStyle/>
+          <a:p>
+            <a:fld id="{DFDF98CC-160E-494C-8C3C-8CDC5FA257DE}" type="slidenum">
+              <a:rPr lang="en-US" smtClean="0"/>
+              <a:t>6</a:t>
+            </a:fld>
+            <a:endParaRPr lang="en-US"/>
+          </a:p>
+        </p:txBody>
+      </p:sp>
     </p:spTree>
     <p:extLst>
       <p:ext uri="{BB962C8B-B14F-4D97-AF65-F5344CB8AC3E}">
@@ -17943,6 +18410,35 @@
           <a:lstStyle/>
           <a:p>
             <a:pPr algn="ctr"/>
+            <a:endParaRPr lang="en-US"/>
+          </a:p>
+        </p:txBody>
+      </p:sp>
+      <p:sp>
+        <p:nvSpPr>
+          <p:cNvPr id="3" name="Slide Number Placeholder 2">
+            <a:extLst>
+              <a:ext uri="{FF2B5EF4-FFF2-40B4-BE49-F238E27FC236}">
+                <a16:creationId xmlns:a16="http://schemas.microsoft.com/office/drawing/2014/main" id="{74D1BE1D-BFCE-C801-EE50-7FDF4EACC7E1}"/>
+              </a:ext>
+            </a:extLst>
+          </p:cNvPr>
+          <p:cNvSpPr>
+            <a:spLocks noGrp="1"/>
+          </p:cNvSpPr>
+          <p:nvPr>
+            <p:ph type="sldNum" sz="quarter" idx="12"/>
+          </p:nvPr>
+        </p:nvSpPr>
+        <p:spPr/>
+        <p:txBody>
+          <a:bodyPr/>
+          <a:lstStyle/>
+          <a:p>
+            <a:fld id="{DFDF98CC-160E-494C-8C3C-8CDC5FA257DE}" type="slidenum">
+              <a:rPr lang="en-US" smtClean="0"/>
+              <a:t>7</a:t>
+            </a:fld>
             <a:endParaRPr lang="en-US"/>
           </a:p>
         </p:txBody>
@@ -18705,6 +19201,35 @@
           </a:p>
         </p:txBody>
       </p:sp>
+      <p:sp>
+        <p:nvSpPr>
+          <p:cNvPr id="3" name="Slide Number Placeholder 2">
+            <a:extLst>
+              <a:ext uri="{FF2B5EF4-FFF2-40B4-BE49-F238E27FC236}">
+                <a16:creationId xmlns:a16="http://schemas.microsoft.com/office/drawing/2014/main" id="{7AF5E012-9598-531D-4E67-ED64E18EED92}"/>
+              </a:ext>
+            </a:extLst>
+          </p:cNvPr>
+          <p:cNvSpPr>
+            <a:spLocks noGrp="1"/>
+          </p:cNvSpPr>
+          <p:nvPr>
+            <p:ph type="sldNum" sz="quarter" idx="12"/>
+          </p:nvPr>
+        </p:nvSpPr>
+        <p:spPr/>
+        <p:txBody>
+          <a:bodyPr/>
+          <a:lstStyle/>
+          <a:p>
+            <a:fld id="{DFDF98CC-160E-494C-8C3C-8CDC5FA257DE}" type="slidenum">
+              <a:rPr lang="en-US" smtClean="0"/>
+              <a:t>8</a:t>
+            </a:fld>
+            <a:endParaRPr lang="en-US"/>
+          </a:p>
+        </p:txBody>
+      </p:sp>
     </p:spTree>
     <p:extLst>
       <p:ext uri="{BB962C8B-B14F-4D97-AF65-F5344CB8AC3E}">
@@ -19364,6 +19889,35 @@
           <a:lstStyle/>
           <a:p>
             <a:pPr algn="ctr"/>
+            <a:endParaRPr lang="en-US"/>
+          </a:p>
+        </p:txBody>
+      </p:sp>
+      <p:sp>
+        <p:nvSpPr>
+          <p:cNvPr id="3" name="Slide Number Placeholder 2">
+            <a:extLst>
+              <a:ext uri="{FF2B5EF4-FFF2-40B4-BE49-F238E27FC236}">
+                <a16:creationId xmlns:a16="http://schemas.microsoft.com/office/drawing/2014/main" id="{5784F81B-C326-0E5C-0675-D1CC0A681A6E}"/>
+              </a:ext>
+            </a:extLst>
+          </p:cNvPr>
+          <p:cNvSpPr>
+            <a:spLocks noGrp="1"/>
+          </p:cNvSpPr>
+          <p:nvPr>
+            <p:ph type="sldNum" sz="quarter" idx="12"/>
+          </p:nvPr>
+        </p:nvSpPr>
+        <p:spPr/>
+        <p:txBody>
+          <a:bodyPr/>
+          <a:lstStyle/>
+          <a:p>
+            <a:fld id="{DFDF98CC-160E-494C-8C3C-8CDC5FA257DE}" type="slidenum">
+              <a:rPr lang="en-US" smtClean="0"/>
+              <a:t>9</a:t>
+            </a:fld>
             <a:endParaRPr lang="en-US"/>
           </a:p>
         </p:txBody>
